--- a/dist/초6/수학/연산과비례/초6_수학_연산과비례_06_백분율_학생용.pptx
+++ b/dist/초6/수학/연산과비례/초6_수학_연산과비례_06_백분율_학생용.pptx
@@ -120,13 +120,13 @@
   <p:extLst>
     <p:ext uri="{521415D9-36F7-43E2-AB2F-B90AF26B5E84}">
       <p14:sectionLst xmlns:p14="http://schemas.microsoft.com/office/powerpoint/2010/main">
-        <p14:section name="도입" id="{95bb425d-f671-5bb5-3606-027485ca2d0f}">
+        <p14:section name="도입" id="{2c815f29-483a-cc13-3e72-7e5f2558bca6}">
           <p14:sldIdLst>
             <p14:sldId id="256"/>
             <p14:sldId id="257"/>
           </p14:sldIdLst>
         </p14:section>
-        <p14:section name="개념" id="{c5f2b4e3-e466-8429-7de7-8d8a57547645}">
+        <p14:section name="개념" id="{2cb0d46a-4557-e2ed-3921-4632c08c1523}">
           <p14:sldIdLst>
             <p14:sldId id="258"/>
             <p14:sldId id="259"/>
@@ -134,7 +134,7 @@
             <p14:sldId id="263"/>
           </p14:sldIdLst>
         </p14:section>
-        <p14:section name="연습" id="{0b6db161-23d8-c266-06e1-9c1bddbccdfd}">
+        <p14:section name="연습" id="{6be01892-93c0-2672-ea58-4d2d3d624591}">
           <p14:sldIdLst>
             <p14:sldId id="260"/>
             <p14:sldId id="261"/>
@@ -142,24 +142,24 @@
             <p14:sldId id="265"/>
           </p14:sldIdLst>
         </p14:section>
-        <p14:section name="개념" id="{fa08ab8b-9871-55e3-6f31-482f8f9c41e6}">
+        <p14:section name="개념" id="{8badf244-fa98-03a3-304a-84d1545e7d2d}">
           <p14:sldIdLst/>
         </p14:section>
-        <p14:section name="연습" id="{cc3016ba-2732-8968-6930-7640da4331f8}">
+        <p14:section name="연습" id="{bc2c8394-6bef-f257-3699-06cc68787048}">
           <p14:sldIdLst/>
         </p14:section>
-        <p14:section name="확인" id="{d7b22399-e903-d3c9-7783-b96a655c42c9}">
+        <p14:section name="확인" id="{b9e9817e-9d86-357d-a5db-5a5b9510c50e}">
           <p14:sldIdLst>
             <p14:sldId id="266"/>
             <p14:sldId id="267"/>
           </p14:sldIdLst>
         </p14:section>
-        <p14:section name="정리" id="{02efb7ea-52e1-bf6d-044c-fb583617492b}">
+        <p14:section name="정리" id="{1a63d84b-a1e8-71f3-016d-d7a7bd9bc486}">
           <p14:sldIdLst>
             <p14:sldId id="268"/>
           </p14:sldIdLst>
         </p14:section>
-        <p14:section name="보충" id="{4af96e53-f1f8-e0aa-45e6-d3a662a011c9}">
+        <p14:section name="보충" id="{26c384a4-2801-f261-21d8-06438769f232}">
           <p14:sldIdLst>
             <p14:sldId id="269"/>
           </p14:sldIdLst>
@@ -2844,7 +2844,7 @@
                 <a:ea typeface="맑은 고딕" pitchFamily="34" charset="-122"/>
                 <a:cs typeface="맑은 고딕" pitchFamily="34" charset="-120"/>
               </a:rPr>
-              <a:t>티셔츠를 20 % 할인해서 판대요.</a:t>
+              <a:t>티셔츠를 20 % 할인해서 판대요.</a:t>
             </a:r>
             <a:endParaRPr lang="ko-KR" sz="2800" dirty="0"/>
           </a:p>
@@ -5632,7 +5632,7 @@
                 <a:ea typeface="맑은 고딕" pitchFamily="34" charset="-122"/>
                 <a:cs typeface="맑은 고딕" pitchFamily="34" charset="-120"/>
               </a:rPr>
-              <a:t>10000원짜리 필통을 30 % 할인해요.</a:t>
+              <a:t>10000원짜리 필통을 30 % 할인해요.</a:t>
             </a:r>
             <a:endParaRPr lang="ko-KR" sz="2800" dirty="0"/>
           </a:p>
@@ -6444,7 +6444,7 @@
                 <a:ea typeface="맑은 고딕" pitchFamily="34" charset="-122"/>
                 <a:cs typeface="맑은 고딕" pitchFamily="34" charset="-120"/>
               </a:rPr>
-              <a:t>35 % → 소수 □</a:t>
+              <a:t>35 % → 소수 □</a:t>
             </a:r>
             <a:endParaRPr lang="ko-KR" sz="3200" dirty="0"/>
           </a:p>
@@ -6547,7 +6547,7 @@
                 <a:ea typeface="맑은 고딕" pitchFamily="34" charset="-122"/>
                 <a:cs typeface="맑은 고딕" pitchFamily="34" charset="-120"/>
               </a:rPr>
-              <a:t>25 % 할인한 판매</a:t>
+              <a:t>25 % 할인한 판매</a:t>
             </a:r>
             <a:endParaRPr lang="ko-KR" sz="2800" dirty="0"/>
           </a:p>
@@ -6764,7 +6764,7 @@
                 <a:ea typeface="맑은 고딕" pitchFamily="34" charset="-122"/>
                 <a:cs typeface="맑은 고딕" pitchFamily="34" charset="-120"/>
               </a:rPr>
-              <a:t>10000원짜리 같은 물건을 가 가게는 20 % 할인,</a:t>
+              <a:t>10000원짜리 같은 물건을 가 가게는 20 % 할인,</a:t>
             </a:r>
             <a:endParaRPr lang="ko-KR" sz="2800" dirty="0"/>
           </a:p>
@@ -7161,7 +7161,7 @@
                 <a:ea typeface="맑은 고딕" pitchFamily="34" charset="-122"/>
                 <a:cs typeface="맑은 고딕" pitchFamily="34" charset="-120"/>
               </a:rPr>
-              <a:t>× 0.8을 8 %라고 하기</a:t>
+              <a:t>× 0.8을 8 %라고 하기</a:t>
             </a:r>
             <a:endParaRPr lang="ko-KR" sz="2200" dirty="0"/>
           </a:p>
@@ -7351,7 +7351,7 @@
                 <a:ea typeface="맑은 고딕" pitchFamily="34" charset="-122"/>
                 <a:cs typeface="맑은 고딕" pitchFamily="34" charset="-120"/>
               </a:rPr>
-              <a:t>③ 8000원의 10 %는</a:t>
+              <a:t>③ 8000원의 10 %는</a:t>
             </a:r>
             <a:endParaRPr lang="ko-KR" sz="2200" dirty="0"/>
           </a:p>
@@ -11624,7 +11624,7 @@
                 <a:ea typeface="맑은 고딕" pitchFamily="34" charset="-122"/>
                 <a:cs typeface="맑은 고딕" pitchFamily="34" charset="-120"/>
               </a:rPr>
-              <a:t>37 %</a:t>
+              <a:t>37 %</a:t>
             </a:r>
             <a:endParaRPr lang="ko-KR" sz="2800" dirty="0"/>
           </a:p>
@@ -13436,7 +13436,7 @@
                 <a:ea typeface="맑은 고딕" pitchFamily="34" charset="-122"/>
                 <a:cs typeface="맑은 고딕" pitchFamily="34" charset="-120"/>
               </a:rPr>
-              <a:t>65 % → □</a:t>
+              <a:t>65 % → □</a:t>
             </a:r>
             <a:endParaRPr lang="ko-KR" sz="3200" dirty="0"/>
           </a:p>
@@ -13522,7 +13522,7 @@
                 <a:ea typeface="맑은 고딕" pitchFamily="34" charset="-122"/>
                 <a:cs typeface="맑은 고딕" pitchFamily="34" charset="-120"/>
               </a:rPr>
-              <a:t>7 % → □</a:t>
+              <a:t>7 % → □</a:t>
             </a:r>
             <a:endParaRPr lang="ko-KR" sz="3200" dirty="0"/>
           </a:p>
@@ -13821,7 +13821,7 @@
                 <a:ea typeface="맑은 고딕" pitchFamily="34" charset="-122"/>
                 <a:cs typeface="맑은 고딕" pitchFamily="34" charset="-120"/>
               </a:rPr>
-              <a:t>토끼: 8 %</a:t>
+              <a:t>토끼: 8 %</a:t>
             </a:r>
             <a:endParaRPr lang="ko-KR" sz="2200" dirty="0"/>
           </a:p>
@@ -13924,7 +13924,7 @@
                 <a:ea typeface="맑은 고딕" pitchFamily="34" charset="-122"/>
                 <a:cs typeface="맑은 고딕" pitchFamily="34" charset="-120"/>
               </a:rPr>
-              <a:t>곰: 80 %</a:t>
+              <a:t>곰: 80 %</a:t>
             </a:r>
             <a:endParaRPr lang="ko-KR" sz="2200" dirty="0"/>
           </a:p>
@@ -13980,7 +13980,7 @@
                 <a:ea typeface="맑은 고딕" pitchFamily="34" charset="-122"/>
                 <a:cs typeface="맑은 고딕" pitchFamily="34" charset="-120"/>
               </a:rPr>
-              <a:t>그래서 80 %예요.</a:t>
+              <a:t>그래서 80 %예요.</a:t>
             </a:r>
             <a:endParaRPr lang="ko-KR" sz="2800" dirty="0"/>
           </a:p>
@@ -15027,7 +15027,7 @@
                           <a:ea typeface="맑은 고딕" pitchFamily="34" charset="-122"/>
                           <a:cs typeface="맑은 고딕" pitchFamily="34" charset="-120"/>
                         </a:rPr>
-                        <a:t>48 %</a:t>
+                        <a:t>48 %</a:t>
                       </a:r>
                       <a:endParaRPr lang="en-US" sz="2800" dirty="0">
                         <a:latin typeface="맑은 고딕" charset="0"/>
@@ -15231,7 +15231,7 @@
                           <a:ea typeface="맑은 고딕" pitchFamily="34" charset="-122"/>
                           <a:cs typeface="맑은 고딕" pitchFamily="34" charset="-120"/>
                         </a:rPr>
-                        <a:t>100 %</a:t>
+                        <a:t>100 %</a:t>
                       </a:r>
                       <a:endParaRPr lang="en-US" sz="2800" dirty="0">
                         <a:latin typeface="맑은 고딕" charset="0"/>
@@ -15503,7 +15503,7 @@
                 <a:ea typeface="맑은 고딕" pitchFamily="34" charset="-122"/>
                 <a:cs typeface="맑은 고딕" pitchFamily="34" charset="-120"/>
               </a:rPr>
-              <a:t>15000원짜리 티셔츠를 20 % 할인해요.</a:t>
+              <a:t>15000원짜리 티셔츠를 20 % 할인해요.</a:t>
             </a:r>
             <a:endParaRPr lang="ko-KR" sz="2800" dirty="0"/>
           </a:p>
@@ -15819,7 +15819,7 @@
                 <a:ea typeface="맑은 고딕" pitchFamily="34" charset="-122"/>
                 <a:cs typeface="맑은 고딕" pitchFamily="34" charset="-120"/>
               </a:rPr>
-              <a:t>한 칸 1500원 (10 %)</a:t>
+              <a:t>한 칸 1500원 (10 %)</a:t>
             </a:r>
             <a:endParaRPr lang="ko-KR" sz="2200" dirty="0"/>
           </a:p>
@@ -16307,7 +16307,7 @@
                 <a:ea typeface="맑은 고딕" pitchFamily="34" charset="-122"/>
                 <a:cs typeface="맑은 고딕" pitchFamily="34" charset="-120"/>
               </a:rPr>
-              <a:t>20000원짜리 가방을 30 % 할인하면</a:t>
+              <a:t>20000원짜리 가방을 30 % 할인하면</a:t>
             </a:r>
             <a:endParaRPr lang="ko-KR" sz="2800" dirty="0"/>
           </a:p>
